--- a/Progettino_IIA_2024_2025.pptx
+++ b/Progettino_IIA_2024_2025.pptx
@@ -131,6 +131,78 @@
 </p:presentation>
 </file>
 
+<file path=ppt/changesInfos/changesInfo1.xml><?xml version="1.0" encoding="utf-8"?>
+<pc:chgInfo xmlns:a="http://schemas.openxmlformats.org/drawingml/2006/main" xmlns:r="http://schemas.openxmlformats.org/officeDocument/2006/relationships" xmlns:ac="http://schemas.microsoft.com/office/drawing/2013/main/command" xmlns:pc="http://schemas.microsoft.com/office/powerpoint/2013/main/command">
+  <pc:docChgLst>
+    <pc:chgData name="Gianluca Rota" userId="741ea600a0951509" providerId="LiveId" clId="{ABDEB660-C30E-4CF4-AAFC-0E1D7567D007}"/>
+    <pc:docChg chg="custSel modSld">
+      <pc:chgData name="Gianluca Rota" userId="741ea600a0951509" providerId="LiveId" clId="{ABDEB660-C30E-4CF4-AAFC-0E1D7567D007}" dt="2025-02-25T21:34:47.303" v="35" actId="20577"/>
+      <pc:docMkLst>
+        <pc:docMk/>
+      </pc:docMkLst>
+      <pc:sldChg chg="delSp modSp mod delAnim modAnim">
+        <pc:chgData name="Gianluca Rota" userId="741ea600a0951509" providerId="LiveId" clId="{ABDEB660-C30E-4CF4-AAFC-0E1D7567D007}" dt="2025-02-14T20:41:05.850" v="22"/>
+        <pc:sldMkLst>
+          <pc:docMk/>
+          <pc:sldMk cId="263784652" sldId="258"/>
+        </pc:sldMkLst>
+        <pc:picChg chg="mod">
+          <ac:chgData name="Gianluca Rota" userId="741ea600a0951509" providerId="LiveId" clId="{ABDEB660-C30E-4CF4-AAFC-0E1D7567D007}" dt="2025-02-14T20:38:44.292" v="7" actId="1076"/>
+          <ac:picMkLst>
+            <pc:docMk/>
+            <pc:sldMk cId="263784652" sldId="258"/>
+            <ac:picMk id="6" creationId="{E65DE170-C9BA-6238-01A6-C5C2FCB5B200}"/>
+          </ac:picMkLst>
+        </pc:picChg>
+      </pc:sldChg>
+      <pc:sldChg chg="modAnim">
+        <pc:chgData name="Gianluca Rota" userId="741ea600a0951509" providerId="LiveId" clId="{ABDEB660-C30E-4CF4-AAFC-0E1D7567D007}" dt="2025-02-21T11:02:38.563" v="33"/>
+        <pc:sldMkLst>
+          <pc:docMk/>
+          <pc:sldMk cId="4058672064" sldId="259"/>
+        </pc:sldMkLst>
+      </pc:sldChg>
+      <pc:sldChg chg="modSp">
+        <pc:chgData name="Gianluca Rota" userId="741ea600a0951509" providerId="LiveId" clId="{ABDEB660-C30E-4CF4-AAFC-0E1D7567D007}" dt="2025-02-25T21:34:47.303" v="35" actId="20577"/>
+        <pc:sldMkLst>
+          <pc:docMk/>
+          <pc:sldMk cId="2288928877" sldId="264"/>
+        </pc:sldMkLst>
+        <pc:spChg chg="mod">
+          <ac:chgData name="Gianluca Rota" userId="741ea600a0951509" providerId="LiveId" clId="{ABDEB660-C30E-4CF4-AAFC-0E1D7567D007}" dt="2025-02-25T21:34:47.303" v="35" actId="20577"/>
+          <ac:spMkLst>
+            <pc:docMk/>
+            <pc:sldMk cId="2288928877" sldId="264"/>
+            <ac:spMk id="6" creationId="{8F09C284-11CB-8E89-5734-7AB2B170AB9A}"/>
+          </ac:spMkLst>
+        </pc:spChg>
+      </pc:sldChg>
+      <pc:sldChg chg="modAnim">
+        <pc:chgData name="Gianluca Rota" userId="741ea600a0951509" providerId="LiveId" clId="{ABDEB660-C30E-4CF4-AAFC-0E1D7567D007}" dt="2025-02-14T20:42:58.817" v="25"/>
+        <pc:sldMkLst>
+          <pc:docMk/>
+          <pc:sldMk cId="399258602" sldId="266"/>
+        </pc:sldMkLst>
+      </pc:sldChg>
+      <pc:sldChg chg="modAnim">
+        <pc:chgData name="Gianluca Rota" userId="741ea600a0951509" providerId="LiveId" clId="{ABDEB660-C30E-4CF4-AAFC-0E1D7567D007}" dt="2025-02-14T20:41:55.256" v="23"/>
+        <pc:sldMkLst>
+          <pc:docMk/>
+          <pc:sldMk cId="202124178" sldId="267"/>
+        </pc:sldMkLst>
+      </pc:sldChg>
+      <pc:sldChg chg="modAnim">
+        <pc:chgData name="Gianluca Rota" userId="741ea600a0951509" providerId="LiveId" clId="{ABDEB660-C30E-4CF4-AAFC-0E1D7567D007}" dt="2025-02-14T20:43:50.722" v="30"/>
+        <pc:sldMkLst>
+          <pc:docMk/>
+          <pc:sldMk cId="2360832672" sldId="273"/>
+        </pc:sldMkLst>
+      </pc:sldChg>
+    </pc:docChg>
+  </pc:docChgLst>
+</pc:chgInfo>
+</file>
+
 <file path=ppt/handoutMasters/handoutMaster1.xml><?xml version="1.0" encoding="utf-8"?>
 <p:handoutMaster xmlns:a="http://schemas.openxmlformats.org/drawingml/2006/main" xmlns:r="http://schemas.openxmlformats.org/officeDocument/2006/relationships" xmlns:p="http://schemas.openxmlformats.org/presentationml/2006/main">
   <p:cSld>
@@ -215,7 +287,7 @@
             <a:pPr rtl="0"/>
             <a:fld id="{2AA9324D-736C-4521-902C-E171322BDD32}" type="datetime1">
               <a:rPr lang="it-IT" smtClean="0"/>
-              <a:t>14/02/2025</a:t>
+              <a:t>25/02/2025</a:t>
             </a:fld>
             <a:endParaRPr lang="en-US" dirty="0"/>
           </a:p>
@@ -385,7 +457,7 @@
             <a:pPr rtl="0"/>
             <a:fld id="{C9CDE5A0-E0EA-4E79-8A9D-490C77C3E1D1}" type="datetime1">
               <a:rPr lang="it-IT" smtClean="0"/>
-              <a:t>14/02/2025</a:t>
+              <a:t>25/02/2025</a:t>
             </a:fld>
             <a:endParaRPr lang="en-US"/>
           </a:p>
@@ -798,7 +870,7 @@
             <a:pPr rtl="0"/>
             <a:fld id="{BE6A9DFD-D01D-46F2-9F5D-64CD124556CA}" type="datetime1">
               <a:rPr lang="it-IT" smtClean="0"/>
-              <a:t>14/02/2025</a:t>
+              <a:t>25/02/2025</a:t>
             </a:fld>
             <a:endParaRPr lang="en-US" dirty="0"/>
           </a:p>
@@ -1012,7 +1084,7 @@
             <a:pPr rtl="0"/>
             <a:fld id="{D6985F1D-99DE-4FE8-9093-377AC3915E25}" type="datetime1">
               <a:rPr lang="it-IT" smtClean="0"/>
-              <a:t>14/02/2025</a:t>
+              <a:t>25/02/2025</a:t>
             </a:fld>
             <a:endParaRPr lang="en-US" dirty="0"/>
           </a:p>
@@ -1230,7 +1302,7 @@
             <a:pPr rtl="0"/>
             <a:fld id="{BAA6CE81-F21E-4C48-B40D-AB03A3BE863B}" type="datetime1">
               <a:rPr lang="it-IT" smtClean="0"/>
-              <a:t>14/02/2025</a:t>
+              <a:t>25/02/2025</a:t>
             </a:fld>
             <a:endParaRPr lang="en-US" dirty="0"/>
           </a:p>
@@ -1435,7 +1507,7 @@
             <a:pPr rtl="0"/>
             <a:fld id="{FC16C3F1-EAB4-40C7-A804-E4164A432ACC}" type="datetime1">
               <a:rPr lang="it-IT" smtClean="0"/>
-              <a:t>14/02/2025</a:t>
+              <a:t>25/02/2025</a:t>
             </a:fld>
             <a:endParaRPr lang="en-US" dirty="0"/>
           </a:p>
@@ -1717,7 +1789,7 @@
             <a:pPr rtl="0"/>
             <a:fld id="{593AB179-A7B4-4F53-8FBC-DA521D7752CD}" type="datetime1">
               <a:rPr lang="it-IT" smtClean="0"/>
-              <a:t>14/02/2025</a:t>
+              <a:t>25/02/2025</a:t>
             </a:fld>
             <a:endParaRPr lang="en-US" dirty="0"/>
           </a:p>
@@ -1988,7 +2060,7 @@
             <a:pPr rtl="0"/>
             <a:fld id="{2BC475E4-8A13-4296-8284-4EFC212D9D0C}" type="datetime1">
               <a:rPr lang="it-IT" smtClean="0"/>
-              <a:t>14/02/2025</a:t>
+              <a:t>25/02/2025</a:t>
             </a:fld>
             <a:endParaRPr lang="en-US" dirty="0"/>
           </a:p>
@@ -2412,7 +2484,7 @@
             <a:pPr rtl="0"/>
             <a:fld id="{2EDAC308-8BE6-45DD-8B68-B04D02410B09}" type="datetime1">
               <a:rPr lang="it-IT" smtClean="0"/>
-              <a:t>14/02/2025</a:t>
+              <a:t>25/02/2025</a:t>
             </a:fld>
             <a:endParaRPr lang="en-US" dirty="0"/>
           </a:p>
@@ -2569,7 +2641,7 @@
             <a:pPr rtl="0"/>
             <a:fld id="{85254269-30BB-4415-A3F6-02D389D24D09}" type="datetime1">
               <a:rPr lang="it-IT" smtClean="0"/>
-              <a:t>14/02/2025</a:t>
+              <a:t>25/02/2025</a:t>
             </a:fld>
             <a:endParaRPr lang="en-US" dirty="0"/>
           </a:p>
@@ -2698,7 +2770,7 @@
             <a:pPr rtl="0"/>
             <a:fld id="{BAA6CE81-F21E-4C48-B40D-AB03A3BE863B}" type="datetime1">
               <a:rPr lang="it-IT" smtClean="0"/>
-              <a:t>14/02/2025</a:t>
+              <a:t>25/02/2025</a:t>
             </a:fld>
             <a:endParaRPr lang="en-US" dirty="0"/>
           </a:p>
@@ -2953,7 +3025,7 @@
             <a:pPr rtl="0"/>
             <a:fld id="{44D8AF99-1FFE-484F-999D-5C9E0DFBE297}" type="datetime1">
               <a:rPr lang="it-IT" smtClean="0"/>
-              <a:t>14/02/2025</a:t>
+              <a:t>25/02/2025</a:t>
             </a:fld>
             <a:endParaRPr lang="en-US" dirty="0"/>
           </a:p>
@@ -3407,7 +3479,7 @@
             <a:pPr rtl="0"/>
             <a:fld id="{BAA6CE81-F21E-4C48-B40D-AB03A3BE863B}" type="datetime1">
               <a:rPr lang="it-IT" smtClean="0"/>
-              <a:t>14/02/2025</a:t>
+              <a:t>25/02/2025</a:t>
             </a:fld>
             <a:endParaRPr lang="en-US" dirty="0"/>
           </a:p>
@@ -3738,7 +3810,7 @@
             <a:pPr rtl="0"/>
             <a:fld id="{BAA6CE81-F21E-4C48-B40D-AB03A3BE863B}" type="datetime1">
               <a:rPr lang="it-IT" smtClean="0"/>
-              <a:t>14/02/2025</a:t>
+              <a:t>25/02/2025</a:t>
             </a:fld>
             <a:endParaRPr lang="en-US" dirty="0"/>
           </a:p>
@@ -6381,6 +6453,41 @@
                                   </p:childTnLst>
                                 </p:cTn>
                               </p:par>
+                              <p:par>
+                                <p:cTn id="57" presetID="16" presetClass="entr" presetSubtype="21" fill="hold" grpId="0" nodeType="withEffect">
+                                  <p:stCondLst>
+                                    <p:cond delay="0"/>
+                                  </p:stCondLst>
+                                  <p:childTnLst>
+                                    <p:set>
+                                      <p:cBhvr>
+                                        <p:cTn id="58" dur="1" fill="hold">
+                                          <p:stCondLst>
+                                            <p:cond delay="0"/>
+                                          </p:stCondLst>
+                                        </p:cTn>
+                                        <p:tgtEl>
+                                          <p:spTgt spid="3"/>
+                                        </p:tgtEl>
+                                        <p:attrNameLst>
+                                          <p:attrName>style.visibility</p:attrName>
+                                        </p:attrNameLst>
+                                      </p:cBhvr>
+                                      <p:to>
+                                        <p:strVal val="visible"/>
+                                      </p:to>
+                                    </p:set>
+                                    <p:animEffect transition="in" filter="barn(inVertical)">
+                                      <p:cBhvr>
+                                        <p:cTn id="59" dur="500"/>
+                                        <p:tgtEl>
+                                          <p:spTgt spid="3"/>
+                                        </p:tgtEl>
+                                      </p:cBhvr>
+                                    </p:animEffect>
+                                  </p:childTnLst>
+                                </p:cTn>
+                              </p:par>
                             </p:childTnLst>
                           </p:cTn>
                         </p:par>
@@ -6414,6 +6521,7 @@
       <p:bldP spid="22" grpId="0"/>
       <p:bldP spid="24" grpId="0"/>
       <p:bldP spid="25" grpId="0"/>
+      <p:bldP spid="3" grpId="0"/>
     </p:bldLst>
   </p:timing>
 </p:sld>
@@ -6656,6 +6764,49 @@
                                   </p:childTnLst>
                                 </p:cTn>
                               </p:par>
+                              <p:par>
+                                <p:cTn id="10" presetID="16" presetClass="entr" presetSubtype="21" fill="hold" grpId="0" nodeType="withEffect">
+                                  <p:stCondLst>
+                                    <p:cond delay="0"/>
+                                  </p:stCondLst>
+                                  <p:childTnLst>
+                                    <p:set>
+                                      <p:cBhvr>
+                                        <p:cTn id="11" dur="1" fill="hold">
+                                          <p:stCondLst>
+                                            <p:cond delay="0"/>
+                                          </p:stCondLst>
+                                        </p:cTn>
+                                        <p:tgtEl>
+                                          <p:spTgt spid="3">
+                                            <p:txEl>
+                                              <p:pRg st="0" end="0"/>
+                                            </p:txEl>
+                                          </p:spTgt>
+                                        </p:tgtEl>
+                                        <p:attrNameLst>
+                                          <p:attrName>style.visibility</p:attrName>
+                                        </p:attrNameLst>
+                                      </p:cBhvr>
+                                      <p:to>
+                                        <p:strVal val="visible"/>
+                                      </p:to>
+                                    </p:set>
+                                    <p:animEffect transition="in" filter="barn(inVertical)">
+                                      <p:cBhvr>
+                                        <p:cTn id="12" dur="500"/>
+                                        <p:tgtEl>
+                                          <p:spTgt spid="3">
+                                            <p:txEl>
+                                              <p:pRg st="0" end="0"/>
+                                            </p:txEl>
+                                          </p:spTgt>
+                                        </p:tgtEl>
+                                      </p:cBhvr>
+                                    </p:animEffect>
+                                  </p:childTnLst>
+                                </p:cTn>
+                              </p:par>
                             </p:childTnLst>
                           </p:cTn>
                         </p:par>
@@ -6684,6 +6835,7 @@
       </p:par>
     </p:tnLst>
     <p:bldLst>
+      <p:bldP spid="3" grpId="0" build="p"/>
       <p:bldP spid="5" grpId="0"/>
     </p:bldLst>
   </p:timing>
@@ -7232,6 +7384,41 @@
                                         </p:tav>
                                       </p:tavLst>
                                     </p:anim>
+                                  </p:childTnLst>
+                                </p:cTn>
+                              </p:par>
+                              <p:par>
+                                <p:cTn id="16" presetID="21" presetClass="entr" presetSubtype="1" fill="hold" nodeType="withEffect">
+                                  <p:stCondLst>
+                                    <p:cond delay="0"/>
+                                  </p:stCondLst>
+                                  <p:childTnLst>
+                                    <p:set>
+                                      <p:cBhvr>
+                                        <p:cTn id="17" dur="1" fill="hold">
+                                          <p:stCondLst>
+                                            <p:cond delay="0"/>
+                                          </p:stCondLst>
+                                        </p:cTn>
+                                        <p:tgtEl>
+                                          <p:spTgt spid="1026"/>
+                                        </p:tgtEl>
+                                        <p:attrNameLst>
+                                          <p:attrName>style.visibility</p:attrName>
+                                        </p:attrNameLst>
+                                      </p:cBhvr>
+                                      <p:to>
+                                        <p:strVal val="visible"/>
+                                      </p:to>
+                                    </p:set>
+                                    <p:animEffect transition="in" filter="wheel(1)">
+                                      <p:cBhvr>
+                                        <p:cTn id="18" dur="2000"/>
+                                        <p:tgtEl>
+                                          <p:spTgt spid="1026"/>
+                                        </p:tgtEl>
+                                      </p:cBhvr>
+                                    </p:animEffect>
                                   </p:childTnLst>
                                 </p:cTn>
                               </p:par>
@@ -7814,117 +8001,6 @@
           </p:txBody>
         </p:sp>
       </p:grpSp>
-      <p:grpSp>
-        <p:nvGrpSpPr>
-          <p:cNvPr id="22" name="Gruppo 21">
-            <a:extLst>
-              <a:ext uri="{FF2B5EF4-FFF2-40B4-BE49-F238E27FC236}">
-                <a16:creationId xmlns:a16="http://schemas.microsoft.com/office/drawing/2014/main" id="{01622652-E68D-CF7D-D8D7-C231C74982A7}"/>
-              </a:ext>
-            </a:extLst>
-          </p:cNvPr>
-          <p:cNvGrpSpPr/>
-          <p:nvPr/>
-        </p:nvGrpSpPr>
-        <p:grpSpPr>
-          <a:xfrm>
-            <a:off x="-595498" y="2483090"/>
-            <a:ext cx="3611402" cy="779679"/>
-            <a:chOff x="1075055" y="4222276"/>
-            <a:chExt cx="3611402" cy="779679"/>
-          </a:xfrm>
-        </p:grpSpPr>
-        <p:sp>
-          <p:nvSpPr>
-            <p:cNvPr id="27" name="CasellaDiTesto 26">
-              <a:extLst>
-                <a:ext uri="{FF2B5EF4-FFF2-40B4-BE49-F238E27FC236}">
-                  <a16:creationId xmlns:a16="http://schemas.microsoft.com/office/drawing/2014/main" id="{455F818E-1DF6-4355-46A5-68D18B8F39FE}"/>
-                </a:ext>
-              </a:extLst>
-            </p:cNvPr>
-            <p:cNvSpPr txBox="1"/>
-            <p:nvPr/>
-          </p:nvSpPr>
-          <p:spPr>
-            <a:xfrm>
-              <a:off x="1166527" y="4222276"/>
-              <a:ext cx="3519930" cy="369332"/>
-            </a:xfrm>
-            <a:prstGeom prst="rect">
-              <a:avLst/>
-            </a:prstGeom>
-            <a:noFill/>
-          </p:spPr>
-          <p:txBody>
-            <a:bodyPr wrap="square" rtlCol="0">
-              <a:spAutoFit/>
-            </a:bodyPr>
-            <a:lstStyle/>
-            <a:p>
-              <a:pPr algn="ctr"/>
-              <a:r>
-                <a:rPr lang="it-IT" b="1" dirty="0" err="1">
-                  <a:latin typeface="Bahnschrift SemiBold" panose="020B0502040204020203" pitchFamily="34" charset="0"/>
-                </a:rPr>
-                <a:t>Preprocessing</a:t>
-              </a:r>
-              <a:endParaRPr lang="it-IT" b="1" dirty="0">
-                <a:latin typeface="Bahnschrift SemiBold" panose="020B0502040204020203" pitchFamily="34" charset="0"/>
-              </a:endParaRPr>
-            </a:p>
-          </p:txBody>
-        </p:sp>
-        <p:sp>
-          <p:nvSpPr>
-            <p:cNvPr id="32" name="CasellaDiTesto 31">
-              <a:extLst>
-                <a:ext uri="{FF2B5EF4-FFF2-40B4-BE49-F238E27FC236}">
-                  <a16:creationId xmlns:a16="http://schemas.microsoft.com/office/drawing/2014/main" id="{9972D5A3-ED7D-3EDA-31F9-ED1E4443D700}"/>
-                </a:ext>
-              </a:extLst>
-            </p:cNvPr>
-            <p:cNvSpPr txBox="1"/>
-            <p:nvPr/>
-          </p:nvSpPr>
-          <p:spPr>
-            <a:xfrm>
-              <a:off x="1075055" y="4294069"/>
-              <a:ext cx="419969" cy="707886"/>
-            </a:xfrm>
-            <a:prstGeom prst="rect">
-              <a:avLst/>
-            </a:prstGeom>
-            <a:noFill/>
-          </p:spPr>
-          <p:txBody>
-            <a:bodyPr wrap="square" rtlCol="0">
-              <a:spAutoFit/>
-            </a:bodyPr>
-            <a:lstStyle/>
-            <a:p>
-              <a:endParaRPr lang="it-IT" sz="4000" b="1" dirty="0">
-                <a:ln w="9525">
-                  <a:solidFill>
-                    <a:schemeClr val="bg1"/>
-                  </a:solidFill>
-                  <a:prstDash val="solid"/>
-                </a:ln>
-                <a:solidFill>
-                  <a:srgbClr val="FF0000"/>
-                </a:solidFill>
-                <a:effectLst>
-                  <a:outerShdw blurRad="12700" dist="38100" dir="2700000" algn="tl" rotWithShape="0">
-                    <a:schemeClr val="bg1">
-                      <a:lumMod val="50000"/>
-                    </a:schemeClr>
-                  </a:outerShdw>
-                </a:effectLst>
-              </a:endParaRPr>
-            </a:p>
-          </p:txBody>
-        </p:sp>
-      </p:grpSp>
       <p:pic>
         <p:nvPicPr>
           <p:cNvPr id="6" name="Immagine 5">
@@ -7947,7 +8023,7 @@
         </p:blipFill>
         <p:spPr>
           <a:xfrm>
-            <a:off x="271661" y="2364167"/>
+            <a:off x="250366" y="2409585"/>
             <a:ext cx="2948012" cy="1212983"/>
           </a:xfrm>
           <a:prstGeom prst="rect">
@@ -9034,7 +9110,7 @@
                             </p:stCondLst>
                             <p:childTnLst>
                               <p:par>
-                                <p:cTn id="26" presetID="2" presetClass="entr" presetSubtype="12" fill="hold" nodeType="afterEffect">
+                                <p:cTn id="26" presetID="2" presetClass="entr" presetSubtype="6" fill="hold" nodeType="afterEffect">
                                   <p:stCondLst>
                                     <p:cond delay="0"/>
                                   </p:stCondLst>
@@ -9047,7 +9123,7 @@
                                           </p:stCondLst>
                                         </p:cTn>
                                         <p:tgtEl>
-                                          <p:spTgt spid="22"/>
+                                          <p:spTgt spid="33"/>
                                         </p:tgtEl>
                                         <p:attrNameLst>
                                           <p:attrName>style.visibility</p:attrName>
@@ -9061,7 +9137,7 @@
                                       <p:cBhvr additive="base">
                                         <p:cTn id="28" dur="500" fill="hold"/>
                                         <p:tgtEl>
-                                          <p:spTgt spid="22"/>
+                                          <p:spTgt spid="33"/>
                                         </p:tgtEl>
                                         <p:attrNameLst>
                                           <p:attrName>ppt_x</p:attrName>
@@ -9070,7 +9146,7 @@
                                       <p:tavLst>
                                         <p:tav tm="0">
                                           <p:val>
-                                            <p:strVal val="0-#ppt_w/2"/>
+                                            <p:strVal val="1+#ppt_w/2"/>
                                           </p:val>
                                         </p:tav>
                                         <p:tav tm="100000">
@@ -9084,7 +9160,7 @@
                                       <p:cBhvr additive="base">
                                         <p:cTn id="29" dur="500" fill="hold"/>
                                         <p:tgtEl>
-                                          <p:spTgt spid="22"/>
+                                          <p:spTgt spid="33"/>
                                         </p:tgtEl>
                                         <p:attrNameLst>
                                           <p:attrName>ppt_y</p:attrName>
@@ -9129,7 +9205,7 @@
                                           </p:stCondLst>
                                         </p:cTn>
                                         <p:tgtEl>
-                                          <p:spTgt spid="33"/>
+                                          <p:spTgt spid="36"/>
                                         </p:tgtEl>
                                         <p:attrNameLst>
                                           <p:attrName>style.visibility</p:attrName>
@@ -9143,7 +9219,7 @@
                                       <p:cBhvr additive="base">
                                         <p:cTn id="33" dur="500" fill="hold"/>
                                         <p:tgtEl>
-                                          <p:spTgt spid="33"/>
+                                          <p:spTgt spid="36"/>
                                         </p:tgtEl>
                                         <p:attrNameLst>
                                           <p:attrName>ppt_x</p:attrName>
@@ -9165,88 +9241,6 @@
                                     <p:anim calcmode="lin" valueType="num">
                                       <p:cBhvr additive="base">
                                         <p:cTn id="34" dur="500" fill="hold"/>
-                                        <p:tgtEl>
-                                          <p:spTgt spid="33"/>
-                                        </p:tgtEl>
-                                        <p:attrNameLst>
-                                          <p:attrName>ppt_y</p:attrName>
-                                        </p:attrNameLst>
-                                      </p:cBhvr>
-                                      <p:tavLst>
-                                        <p:tav tm="0">
-                                          <p:val>
-                                            <p:strVal val="1+#ppt_h/2"/>
-                                          </p:val>
-                                        </p:tav>
-                                        <p:tav tm="100000">
-                                          <p:val>
-                                            <p:strVal val="#ppt_y"/>
-                                          </p:val>
-                                        </p:tav>
-                                      </p:tavLst>
-                                    </p:anim>
-                                  </p:childTnLst>
-                                </p:cTn>
-                              </p:par>
-                            </p:childTnLst>
-                          </p:cTn>
-                        </p:par>
-                        <p:par>
-                          <p:cTn id="35" fill="hold">
-                            <p:stCondLst>
-                              <p:cond delay="3500"/>
-                            </p:stCondLst>
-                            <p:childTnLst>
-                              <p:par>
-                                <p:cTn id="36" presetID="2" presetClass="entr" presetSubtype="6" fill="hold" nodeType="afterEffect">
-                                  <p:stCondLst>
-                                    <p:cond delay="0"/>
-                                  </p:stCondLst>
-                                  <p:childTnLst>
-                                    <p:set>
-                                      <p:cBhvr>
-                                        <p:cTn id="37" dur="1" fill="hold">
-                                          <p:stCondLst>
-                                            <p:cond delay="0"/>
-                                          </p:stCondLst>
-                                        </p:cTn>
-                                        <p:tgtEl>
-                                          <p:spTgt spid="36"/>
-                                        </p:tgtEl>
-                                        <p:attrNameLst>
-                                          <p:attrName>style.visibility</p:attrName>
-                                        </p:attrNameLst>
-                                      </p:cBhvr>
-                                      <p:to>
-                                        <p:strVal val="visible"/>
-                                      </p:to>
-                                    </p:set>
-                                    <p:anim calcmode="lin" valueType="num">
-                                      <p:cBhvr additive="base">
-                                        <p:cTn id="38" dur="500" fill="hold"/>
-                                        <p:tgtEl>
-                                          <p:spTgt spid="36"/>
-                                        </p:tgtEl>
-                                        <p:attrNameLst>
-                                          <p:attrName>ppt_x</p:attrName>
-                                        </p:attrNameLst>
-                                      </p:cBhvr>
-                                      <p:tavLst>
-                                        <p:tav tm="0">
-                                          <p:val>
-                                            <p:strVal val="1+#ppt_w/2"/>
-                                          </p:val>
-                                        </p:tav>
-                                        <p:tav tm="100000">
-                                          <p:val>
-                                            <p:strVal val="#ppt_x"/>
-                                          </p:val>
-                                        </p:tav>
-                                      </p:tavLst>
-                                    </p:anim>
-                                    <p:anim calcmode="lin" valueType="num">
-                                      <p:cBhvr additive="base">
-                                        <p:cTn id="39" dur="500" fill="hold"/>
                                         <p:tgtEl>
                                           <p:spTgt spid="36"/>
                                         </p:tgtEl>
@@ -9271,14 +9265,14 @@
                                 </p:cTn>
                               </p:par>
                               <p:par>
-                                <p:cTn id="40" presetID="6" presetClass="entr" presetSubtype="16" fill="hold" nodeType="withEffect">
+                                <p:cTn id="35" presetID="6" presetClass="entr" presetSubtype="16" fill="hold" nodeType="withEffect">
                                   <p:stCondLst>
                                     <p:cond delay="0"/>
                                   </p:stCondLst>
                                   <p:childTnLst>
                                     <p:set>
                                       <p:cBhvr>
-                                        <p:cTn id="41" dur="1" fill="hold">
+                                        <p:cTn id="36" dur="1" fill="hold">
                                           <p:stCondLst>
                                             <p:cond delay="0"/>
                                           </p:stCondLst>
@@ -9296,7 +9290,7 @@
                                     </p:set>
                                     <p:animEffect transition="in" filter="circle(in)">
                                       <p:cBhvr>
-                                        <p:cTn id="42" dur="2000"/>
+                                        <p:cTn id="37" dur="2000"/>
                                         <p:tgtEl>
                                           <p:spTgt spid="6"/>
                                         </p:tgtEl>
@@ -9306,14 +9300,14 @@
                                 </p:cTn>
                               </p:par>
                               <p:par>
-                                <p:cTn id="43" presetID="21" presetClass="entr" presetSubtype="1" fill="hold" nodeType="withEffect">
+                                <p:cTn id="38" presetID="21" presetClass="entr" presetSubtype="1" fill="hold" nodeType="withEffect">
                                   <p:stCondLst>
                                     <p:cond delay="0"/>
                                   </p:stCondLst>
                                   <p:childTnLst>
                                     <p:set>
                                       <p:cBhvr>
-                                        <p:cTn id="44" dur="1" fill="hold">
+                                        <p:cTn id="39" dur="1" fill="hold">
                                           <p:stCondLst>
                                             <p:cond delay="0"/>
                                           </p:stCondLst>
@@ -9331,7 +9325,7 @@
                                     </p:set>
                                     <p:animEffect transition="in" filter="wheel(1)">
                                       <p:cBhvr>
-                                        <p:cTn id="45" dur="2000"/>
+                                        <p:cTn id="40" dur="2000"/>
                                         <p:tgtEl>
                                           <p:spTgt spid="12"/>
                                         </p:tgtEl>
@@ -9341,14 +9335,14 @@
                                 </p:cTn>
                               </p:par>
                               <p:par>
-                                <p:cTn id="46" presetID="6" presetClass="entr" presetSubtype="16" fill="hold" nodeType="withEffect">
+                                <p:cTn id="41" presetID="6" presetClass="entr" presetSubtype="16" fill="hold" nodeType="withEffect">
                                   <p:stCondLst>
                                     <p:cond delay="0"/>
                                   </p:stCondLst>
                                   <p:childTnLst>
                                     <p:set>
                                       <p:cBhvr>
-                                        <p:cTn id="47" dur="1" fill="hold">
+                                        <p:cTn id="42" dur="1" fill="hold">
                                           <p:stCondLst>
                                             <p:cond delay="0"/>
                                           </p:stCondLst>
@@ -9366,7 +9360,7 @@
                                     </p:set>
                                     <p:animEffect transition="in" filter="circle(in)">
                                       <p:cBhvr>
-                                        <p:cTn id="48" dur="2000"/>
+                                        <p:cTn id="43" dur="2000"/>
                                         <p:tgtEl>
                                           <p:spTgt spid="18"/>
                                         </p:tgtEl>
@@ -9376,14 +9370,14 @@
                                 </p:cTn>
                               </p:par>
                               <p:par>
-                                <p:cTn id="49" presetID="31" presetClass="entr" presetSubtype="0" fill="hold" nodeType="withEffect">
+                                <p:cTn id="44" presetID="31" presetClass="entr" presetSubtype="0" fill="hold" nodeType="withEffect">
                                   <p:stCondLst>
                                     <p:cond delay="0"/>
                                   </p:stCondLst>
                                   <p:childTnLst>
                                     <p:set>
                                       <p:cBhvr>
-                                        <p:cTn id="50" dur="1" fill="hold">
+                                        <p:cTn id="45" dur="1" fill="hold">
                                           <p:stCondLst>
                                             <p:cond delay="0"/>
                                           </p:stCondLst>
@@ -9401,7 +9395,7 @@
                                     </p:set>
                                     <p:anim calcmode="lin" valueType="num">
                                       <p:cBhvr>
-                                        <p:cTn id="51" dur="1000" fill="hold"/>
+                                        <p:cTn id="46" dur="1000" fill="hold"/>
                                         <p:tgtEl>
                                           <p:spTgt spid="24"/>
                                         </p:tgtEl>
@@ -9424,7 +9418,7 @@
                                     </p:anim>
                                     <p:anim calcmode="lin" valueType="num">
                                       <p:cBhvr>
-                                        <p:cTn id="52" dur="1000" fill="hold"/>
+                                        <p:cTn id="47" dur="1000" fill="hold"/>
                                         <p:tgtEl>
                                           <p:spTgt spid="24"/>
                                         </p:tgtEl>
@@ -9447,7 +9441,7 @@
                                     </p:anim>
                                     <p:anim calcmode="lin" valueType="num">
                                       <p:cBhvr>
-                                        <p:cTn id="53" dur="1000" fill="hold"/>
+                                        <p:cTn id="48" dur="1000" fill="hold"/>
                                         <p:tgtEl>
                                           <p:spTgt spid="24"/>
                                         </p:tgtEl>
@@ -9470,7 +9464,7 @@
                                     </p:anim>
                                     <p:animEffect transition="in" filter="fade">
                                       <p:cBhvr>
-                                        <p:cTn id="54" dur="1000"/>
+                                        <p:cTn id="49" dur="1000"/>
                                         <p:tgtEl>
                                           <p:spTgt spid="24"/>
                                         </p:tgtEl>
@@ -9480,14 +9474,14 @@
                                 </p:cTn>
                               </p:par>
                               <p:par>
-                                <p:cTn id="55" presetID="26" presetClass="entr" presetSubtype="0" fill="hold" nodeType="withEffect">
+                                <p:cTn id="50" presetID="26" presetClass="entr" presetSubtype="0" fill="hold" nodeType="withEffect">
                                   <p:stCondLst>
                                     <p:cond delay="0"/>
                                   </p:stCondLst>
                                   <p:childTnLst>
                                     <p:set>
                                       <p:cBhvr>
-                                        <p:cTn id="56" dur="1" fill="hold">
+                                        <p:cTn id="51" dur="1" fill="hold">
                                           <p:stCondLst>
                                             <p:cond delay="0"/>
                                           </p:stCondLst>
@@ -9505,7 +9499,7 @@
                                     </p:set>
                                     <p:animEffect transition="in" filter="wipe(down)">
                                       <p:cBhvr>
-                                        <p:cTn id="57" dur="580">
+                                        <p:cTn id="52" dur="580">
                                           <p:stCondLst>
                                             <p:cond delay="0"/>
                                           </p:stCondLst>
@@ -9517,7 +9511,7 @@
                                     </p:animEffect>
                                     <p:anim calcmode="lin" valueType="num">
                                       <p:cBhvr>
-                                        <p:cTn id="58" dur="1822" tmFilter="0,0; 0.14,0.36; 0.43,0.73; 0.71,0.91; 1.0,1.0">
+                                        <p:cTn id="53" dur="1822" tmFilter="0,0; 0.14,0.36; 0.43,0.73; 0.71,0.91; 1.0,1.0">
                                           <p:stCondLst>
                                             <p:cond delay="0"/>
                                           </p:stCondLst>
@@ -9544,7 +9538,7 @@
                                     </p:anim>
                                     <p:anim calcmode="lin" valueType="num">
                                       <p:cBhvr>
-                                        <p:cTn id="59" dur="664" tmFilter="0.0,0.0; 0.25,0.07; 0.50,0.2; 0.75,0.467; 1.0,1.0">
+                                        <p:cTn id="54" dur="664" tmFilter="0.0,0.0; 0.25,0.07; 0.50,0.2; 0.75,0.467; 1.0,1.0">
                                           <p:stCondLst>
                                             <p:cond delay="0"/>
                                           </p:stCondLst>
@@ -9571,7 +9565,7 @@
                                     </p:anim>
                                     <p:anim calcmode="lin" valueType="num">
                                       <p:cBhvr>
-                                        <p:cTn id="60" dur="664" tmFilter="0, 0; 0.125,0.2665; 0.25,0.4; 0.375,0.465; 0.5,0.5;  0.625,0.535; 0.75,0.6; 0.875,0.7335; 1,1">
+                                        <p:cTn id="55" dur="664" tmFilter="0, 0; 0.125,0.2665; 0.25,0.4; 0.375,0.465; 0.5,0.5;  0.625,0.535; 0.75,0.6; 0.875,0.7335; 1,1">
                                           <p:stCondLst>
                                             <p:cond delay="664"/>
                                           </p:stCondLst>
@@ -9598,7 +9592,7 @@
                                     </p:anim>
                                     <p:anim calcmode="lin" valueType="num">
                                       <p:cBhvr>
-                                        <p:cTn id="61" dur="332" tmFilter="0, 0; 0.125,0.2665; 0.25,0.4; 0.375,0.465; 0.5,0.5;  0.625,0.535; 0.75,0.6; 0.875,0.7335; 1,1">
+                                        <p:cTn id="56" dur="332" tmFilter="0, 0; 0.125,0.2665; 0.25,0.4; 0.375,0.465; 0.5,0.5;  0.625,0.535; 0.75,0.6; 0.875,0.7335; 1,1">
                                           <p:stCondLst>
                                             <p:cond delay="1324"/>
                                           </p:stCondLst>
@@ -9625,7 +9619,7 @@
                                     </p:anim>
                                     <p:anim calcmode="lin" valueType="num">
                                       <p:cBhvr>
-                                        <p:cTn id="62" dur="164" tmFilter="0, 0; 0.125,0.2665; 0.25,0.4; 0.375,0.465; 0.5,0.5;  0.625,0.535; 0.75,0.6; 0.875,0.7335; 1,1">
+                                        <p:cTn id="57" dur="164" tmFilter="0, 0; 0.125,0.2665; 0.25,0.4; 0.375,0.465; 0.5,0.5;  0.625,0.535; 0.75,0.6; 0.875,0.7335; 1,1">
                                           <p:stCondLst>
                                             <p:cond delay="1656"/>
                                           </p:stCondLst>
@@ -9652,7 +9646,7 @@
                                     </p:anim>
                                     <p:animScale>
                                       <p:cBhvr>
-                                        <p:cTn id="63" dur="26">
+                                        <p:cTn id="58" dur="26">
                                           <p:stCondLst>
                                             <p:cond delay="650"/>
                                           </p:stCondLst>
@@ -9665,7 +9659,7 @@
                                     </p:animScale>
                                     <p:animScale>
                                       <p:cBhvr>
-                                        <p:cTn id="64" dur="166" decel="50000">
+                                        <p:cTn id="59" dur="166" decel="50000">
                                           <p:stCondLst>
                                             <p:cond delay="676"/>
                                           </p:stCondLst>
@@ -9678,7 +9672,7 @@
                                     </p:animScale>
                                     <p:animScale>
                                       <p:cBhvr>
-                                        <p:cTn id="65" dur="26">
+                                        <p:cTn id="60" dur="26">
                                           <p:stCondLst>
                                             <p:cond delay="1312"/>
                                           </p:stCondLst>
@@ -9691,7 +9685,7 @@
                                     </p:animScale>
                                     <p:animScale>
                                       <p:cBhvr>
-                                        <p:cTn id="66" dur="166" decel="50000">
+                                        <p:cTn id="61" dur="166" decel="50000">
                                           <p:stCondLst>
                                             <p:cond delay="1338"/>
                                           </p:stCondLst>
@@ -9704,7 +9698,7 @@
                                     </p:animScale>
                                     <p:animScale>
                                       <p:cBhvr>
-                                        <p:cTn id="67" dur="26">
+                                        <p:cTn id="62" dur="26">
                                           <p:stCondLst>
                                             <p:cond delay="1642"/>
                                           </p:stCondLst>
@@ -9717,7 +9711,7 @@
                                     </p:animScale>
                                     <p:animScale>
                                       <p:cBhvr>
-                                        <p:cTn id="68" dur="166" decel="50000">
+                                        <p:cTn id="63" dur="166" decel="50000">
                                           <p:stCondLst>
                                             <p:cond delay="1668"/>
                                           </p:stCondLst>
@@ -9730,7 +9724,7 @@
                                     </p:animScale>
                                     <p:animScale>
                                       <p:cBhvr>
-                                        <p:cTn id="69" dur="26">
+                                        <p:cTn id="64" dur="26">
                                           <p:stCondLst>
                                             <p:cond delay="1808"/>
                                           </p:stCondLst>
@@ -9743,7 +9737,7 @@
                                     </p:animScale>
                                     <p:animScale>
                                       <p:cBhvr>
-                                        <p:cTn id="70" dur="166" decel="50000">
+                                        <p:cTn id="65" dur="166" decel="50000">
                                           <p:stCondLst>
                                             <p:cond delay="1834"/>
                                           </p:stCondLst>
@@ -9758,14 +9752,14 @@
                                 </p:cTn>
                               </p:par>
                               <p:par>
-                                <p:cTn id="71" presetID="16" presetClass="entr" presetSubtype="21" fill="hold" nodeType="withEffect">
+                                <p:cTn id="66" presetID="16" presetClass="entr" presetSubtype="21" fill="hold" nodeType="withEffect">
                                   <p:stCondLst>
                                     <p:cond delay="0"/>
                                   </p:stCondLst>
                                   <p:childTnLst>
                                     <p:set>
                                       <p:cBhvr>
-                                        <p:cTn id="72" dur="1" fill="hold">
+                                        <p:cTn id="67" dur="1" fill="hold">
                                           <p:stCondLst>
                                             <p:cond delay="0"/>
                                           </p:stCondLst>
@@ -9783,7 +9777,7 @@
                                     </p:set>
                                     <p:animEffect transition="in" filter="barn(inVertical)">
                                       <p:cBhvr>
-                                        <p:cTn id="73" dur="500"/>
+                                        <p:cTn id="68" dur="500"/>
                                         <p:tgtEl>
                                           <p:spTgt spid="54"/>
                                         </p:tgtEl>
@@ -9793,14 +9787,14 @@
                                 </p:cTn>
                               </p:par>
                               <p:par>
-                                <p:cTn id="74" presetID="6" presetClass="entr" presetSubtype="16" fill="hold" grpId="0" nodeType="withEffect">
+                                <p:cTn id="69" presetID="6" presetClass="entr" presetSubtype="16" fill="hold" grpId="0" nodeType="withEffect">
                                   <p:stCondLst>
                                     <p:cond delay="0"/>
                                   </p:stCondLst>
                                   <p:childTnLst>
                                     <p:set>
                                       <p:cBhvr>
-                                        <p:cTn id="75" dur="1" fill="hold">
+                                        <p:cTn id="70" dur="1" fill="hold">
                                           <p:stCondLst>
                                             <p:cond delay="0"/>
                                           </p:stCondLst>
@@ -9818,7 +9812,7 @@
                                     </p:set>
                                     <p:animEffect transition="in" filter="circle(in)">
                                       <p:cBhvr>
-                                        <p:cTn id="76" dur="2000"/>
+                                        <p:cTn id="71" dur="2000"/>
                                         <p:tgtEl>
                                           <p:spTgt spid="48"/>
                                         </p:tgtEl>
@@ -9828,20 +9822,101 @@
                                 </p:cTn>
                               </p:par>
                               <p:par>
-                                <p:cTn id="77" presetID="53" presetClass="entr" presetSubtype="16" fill="hold" nodeType="withEffect">
+                                <p:cTn id="72" presetID="53" presetClass="entr" presetSubtype="16" fill="hold" nodeType="withEffect">
                                   <p:stCondLst>
                                     <p:cond delay="0"/>
                                   </p:stCondLst>
                                   <p:childTnLst>
                                     <p:set>
                                       <p:cBhvr>
+                                        <p:cTn id="73" dur="1" fill="hold">
+                                          <p:stCondLst>
+                                            <p:cond delay="0"/>
+                                          </p:stCondLst>
+                                        </p:cTn>
+                                        <p:tgtEl>
+                                          <p:spTgt spid="52"/>
+                                        </p:tgtEl>
+                                        <p:attrNameLst>
+                                          <p:attrName>style.visibility</p:attrName>
+                                        </p:attrNameLst>
+                                      </p:cBhvr>
+                                      <p:to>
+                                        <p:strVal val="visible"/>
+                                      </p:to>
+                                    </p:set>
+                                    <p:anim calcmode="lin" valueType="num">
+                                      <p:cBhvr>
+                                        <p:cTn id="74" dur="500" fill="hold"/>
+                                        <p:tgtEl>
+                                          <p:spTgt spid="52"/>
+                                        </p:tgtEl>
+                                        <p:attrNameLst>
+                                          <p:attrName>ppt_w</p:attrName>
+                                        </p:attrNameLst>
+                                      </p:cBhvr>
+                                      <p:tavLst>
+                                        <p:tav tm="0">
+                                          <p:val>
+                                            <p:fltVal val="0"/>
+                                          </p:val>
+                                        </p:tav>
+                                        <p:tav tm="100000">
+                                          <p:val>
+                                            <p:strVal val="#ppt_w"/>
+                                          </p:val>
+                                        </p:tav>
+                                      </p:tavLst>
+                                    </p:anim>
+                                    <p:anim calcmode="lin" valueType="num">
+                                      <p:cBhvr>
+                                        <p:cTn id="75" dur="500" fill="hold"/>
+                                        <p:tgtEl>
+                                          <p:spTgt spid="52"/>
+                                        </p:tgtEl>
+                                        <p:attrNameLst>
+                                          <p:attrName>ppt_h</p:attrName>
+                                        </p:attrNameLst>
+                                      </p:cBhvr>
+                                      <p:tavLst>
+                                        <p:tav tm="0">
+                                          <p:val>
+                                            <p:fltVal val="0"/>
+                                          </p:val>
+                                        </p:tav>
+                                        <p:tav tm="100000">
+                                          <p:val>
+                                            <p:strVal val="#ppt_h"/>
+                                          </p:val>
+                                        </p:tav>
+                                      </p:tavLst>
+                                    </p:anim>
+                                    <p:animEffect transition="in" filter="fade">
+                                      <p:cBhvr>
+                                        <p:cTn id="76" dur="500"/>
+                                        <p:tgtEl>
+                                          <p:spTgt spid="52"/>
+                                        </p:tgtEl>
+                                      </p:cBhvr>
+                                    </p:animEffect>
+                                  </p:childTnLst>
+                                </p:cTn>
+                              </p:par>
+                              <p:par>
+                                <p:cTn id="77" presetID="10" presetClass="entr" presetSubtype="0" fill="hold" grpId="0" nodeType="withEffect">
+                                  <p:stCondLst>
+                                    <p:cond delay="0"/>
+                                  </p:stCondLst>
+                                  <p:childTnLst>
+                                    <p:set>
+                                      <p:cBhvr>
                                         <p:cTn id="78" dur="1" fill="hold">
                                           <p:stCondLst>
                                             <p:cond delay="0"/>
                                           </p:stCondLst>
                                         </p:cTn>
                                         <p:tgtEl>
-                                          <p:spTgt spid="52"/>
+                                          <p:spTgt spid="2"/>
                                         </p:tgtEl>
                                         <p:attrNameLst>
                                           <p:attrName>style.visibility</p:attrName>
@@ -9851,57 +9926,221 @@
                                         <p:strVal val="visible"/>
                                       </p:to>
                                     </p:set>
-                                    <p:anim calcmode="lin" valueType="num">
-                                      <p:cBhvr>
-                                        <p:cTn id="79" dur="500" fill="hold"/>
-                                        <p:tgtEl>
-                                          <p:spTgt spid="52"/>
-                                        </p:tgtEl>
-                                        <p:attrNameLst>
-                                          <p:attrName>ppt_w</p:attrName>
-                                        </p:attrNameLst>
-                                      </p:cBhvr>
-                                      <p:tavLst>
-                                        <p:tav tm="0">
-                                          <p:val>
-                                            <p:fltVal val="0"/>
-                                          </p:val>
-                                        </p:tav>
-                                        <p:tav tm="100000">
-                                          <p:val>
-                                            <p:strVal val="#ppt_w"/>
-                                          </p:val>
-                                        </p:tav>
-                                      </p:tavLst>
-                                    </p:anim>
-                                    <p:anim calcmode="lin" valueType="num">
-                                      <p:cBhvr>
-                                        <p:cTn id="80" dur="500" fill="hold"/>
-                                        <p:tgtEl>
-                                          <p:spTgt spid="52"/>
-                                        </p:tgtEl>
-                                        <p:attrNameLst>
-                                          <p:attrName>ppt_h</p:attrName>
-                                        </p:attrNameLst>
-                                      </p:cBhvr>
-                                      <p:tavLst>
-                                        <p:tav tm="0">
-                                          <p:val>
-                                            <p:fltVal val="0"/>
-                                          </p:val>
-                                        </p:tav>
-                                        <p:tav tm="100000">
-                                          <p:val>
-                                            <p:strVal val="#ppt_h"/>
-                                          </p:val>
-                                        </p:tav>
-                                      </p:tavLst>
-                                    </p:anim>
                                     <p:animEffect transition="in" filter="fade">
                                       <p:cBhvr>
-                                        <p:cTn id="81" dur="500"/>
-                                        <p:tgtEl>
-                                          <p:spTgt spid="52"/>
+                                        <p:cTn id="79" dur="500"/>
+                                        <p:tgtEl>
+                                          <p:spTgt spid="2"/>
+                                        </p:tgtEl>
+                                      </p:cBhvr>
+                                    </p:animEffect>
+                                  </p:childTnLst>
+                                </p:cTn>
+                              </p:par>
+                              <p:par>
+                                <p:cTn id="80" presetID="10" presetClass="entr" presetSubtype="0" fill="hold" grpId="0" nodeType="withEffect">
+                                  <p:stCondLst>
+                                    <p:cond delay="0"/>
+                                  </p:stCondLst>
+                                  <p:childTnLst>
+                                    <p:set>
+                                      <p:cBhvr>
+                                        <p:cTn id="81" dur="1" fill="hold">
+                                          <p:stCondLst>
+                                            <p:cond delay="0"/>
+                                          </p:stCondLst>
+                                        </p:cTn>
+                                        <p:tgtEl>
+                                          <p:spTgt spid="9"/>
+                                        </p:tgtEl>
+                                        <p:attrNameLst>
+                                          <p:attrName>style.visibility</p:attrName>
+                                        </p:attrNameLst>
+                                      </p:cBhvr>
+                                      <p:to>
+                                        <p:strVal val="visible"/>
+                                      </p:to>
+                                    </p:set>
+                                    <p:animEffect transition="in" filter="fade">
+                                      <p:cBhvr>
+                                        <p:cTn id="82" dur="500"/>
+                                        <p:tgtEl>
+                                          <p:spTgt spid="9"/>
+                                        </p:tgtEl>
+                                      </p:cBhvr>
+                                    </p:animEffect>
+                                  </p:childTnLst>
+                                </p:cTn>
+                              </p:par>
+                              <p:par>
+                                <p:cTn id="83" presetID="10" presetClass="entr" presetSubtype="0" fill="hold" grpId="0" nodeType="withEffect">
+                                  <p:stCondLst>
+                                    <p:cond delay="0"/>
+                                  </p:stCondLst>
+                                  <p:childTnLst>
+                                    <p:set>
+                                      <p:cBhvr>
+                                        <p:cTn id="84" dur="1" fill="hold">
+                                          <p:stCondLst>
+                                            <p:cond delay="0"/>
+                                          </p:stCondLst>
+                                        </p:cTn>
+                                        <p:tgtEl>
+                                          <p:spTgt spid="21"/>
+                                        </p:tgtEl>
+                                        <p:attrNameLst>
+                                          <p:attrName>style.visibility</p:attrName>
+                                        </p:attrNameLst>
+                                      </p:cBhvr>
+                                      <p:to>
+                                        <p:strVal val="visible"/>
+                                      </p:to>
+                                    </p:set>
+                                    <p:animEffect transition="in" filter="fade">
+                                      <p:cBhvr>
+                                        <p:cTn id="85" dur="500"/>
+                                        <p:tgtEl>
+                                          <p:spTgt spid="21"/>
+                                        </p:tgtEl>
+                                      </p:cBhvr>
+                                    </p:animEffect>
+                                  </p:childTnLst>
+                                </p:cTn>
+                              </p:par>
+                              <p:par>
+                                <p:cTn id="86" presetID="10" presetClass="entr" presetSubtype="0" fill="hold" grpId="0" nodeType="withEffect">
+                                  <p:stCondLst>
+                                    <p:cond delay="0"/>
+                                  </p:stCondLst>
+                                  <p:childTnLst>
+                                    <p:set>
+                                      <p:cBhvr>
+                                        <p:cTn id="87" dur="1" fill="hold">
+                                          <p:stCondLst>
+                                            <p:cond delay="0"/>
+                                          </p:stCondLst>
+                                        </p:cTn>
+                                        <p:tgtEl>
+                                          <p:spTgt spid="23"/>
+                                        </p:tgtEl>
+                                        <p:attrNameLst>
+                                          <p:attrName>style.visibility</p:attrName>
+                                        </p:attrNameLst>
+                                      </p:cBhvr>
+                                      <p:to>
+                                        <p:strVal val="visible"/>
+                                      </p:to>
+                                    </p:set>
+                                    <p:animEffect transition="in" filter="fade">
+                                      <p:cBhvr>
+                                        <p:cTn id="88" dur="500"/>
+                                        <p:tgtEl>
+                                          <p:spTgt spid="23"/>
+                                        </p:tgtEl>
+                                      </p:cBhvr>
+                                    </p:animEffect>
+                                  </p:childTnLst>
+                                </p:cTn>
+                              </p:par>
+                              <p:par>
+                                <p:cTn id="89" presetID="10" presetClass="entr" presetSubtype="0" fill="hold" grpId="0" nodeType="withEffect">
+                                  <p:stCondLst>
+                                    <p:cond delay="0"/>
+                                  </p:stCondLst>
+                                  <p:childTnLst>
+                                    <p:set>
+                                      <p:cBhvr>
+                                        <p:cTn id="90" dur="1" fill="hold">
+                                          <p:stCondLst>
+                                            <p:cond delay="0"/>
+                                          </p:stCondLst>
+                                        </p:cTn>
+                                        <p:tgtEl>
+                                          <p:spTgt spid="26"/>
+                                        </p:tgtEl>
+                                        <p:attrNameLst>
+                                          <p:attrName>style.visibility</p:attrName>
+                                        </p:attrNameLst>
+                                      </p:cBhvr>
+                                      <p:to>
+                                        <p:strVal val="visible"/>
+                                      </p:to>
+                                    </p:set>
+                                    <p:animEffect transition="in" filter="fade">
+                                      <p:cBhvr>
+                                        <p:cTn id="91" dur="500"/>
+                                        <p:tgtEl>
+                                          <p:spTgt spid="26"/>
+                                        </p:tgtEl>
+                                      </p:cBhvr>
+                                    </p:animEffect>
+                                  </p:childTnLst>
+                                </p:cTn>
+                              </p:par>
+                              <p:par>
+                                <p:cTn id="92" presetID="10" presetClass="entr" presetSubtype="0" fill="hold" grpId="0" nodeType="withEffect">
+                                  <p:stCondLst>
+                                    <p:cond delay="0"/>
+                                  </p:stCondLst>
+                                  <p:childTnLst>
+                                    <p:set>
+                                      <p:cBhvr>
+                                        <p:cTn id="93" dur="1" fill="hold">
+                                          <p:stCondLst>
+                                            <p:cond delay="0"/>
+                                          </p:stCondLst>
+                                        </p:cTn>
+                                        <p:tgtEl>
+                                          <p:spTgt spid="13"/>
+                                        </p:tgtEl>
+                                        <p:attrNameLst>
+                                          <p:attrName>style.visibility</p:attrName>
+                                        </p:attrNameLst>
+                                      </p:cBhvr>
+                                      <p:to>
+                                        <p:strVal val="visible"/>
+                                      </p:to>
+                                    </p:set>
+                                    <p:animEffect transition="in" filter="fade">
+                                      <p:cBhvr>
+                                        <p:cTn id="94" dur="500"/>
+                                        <p:tgtEl>
+                                          <p:spTgt spid="13"/>
+                                        </p:tgtEl>
+                                      </p:cBhvr>
+                                    </p:animEffect>
+                                  </p:childTnLst>
+                                </p:cTn>
+                              </p:par>
+                              <p:par>
+                                <p:cTn id="95" presetID="10" presetClass="entr" presetSubtype="0" fill="hold" grpId="0" nodeType="withEffect">
+                                  <p:stCondLst>
+                                    <p:cond delay="0"/>
+                                  </p:stCondLst>
+                                  <p:childTnLst>
+                                    <p:set>
+                                      <p:cBhvr>
+                                        <p:cTn id="96" dur="1" fill="hold">
+                                          <p:stCondLst>
+                                            <p:cond delay="0"/>
+                                          </p:stCondLst>
+                                        </p:cTn>
+                                        <p:tgtEl>
+                                          <p:spTgt spid="7"/>
+                                        </p:tgtEl>
+                                        <p:attrNameLst>
+                                          <p:attrName>style.visibility</p:attrName>
+                                        </p:attrNameLst>
+                                      </p:cBhvr>
+                                      <p:to>
+                                        <p:strVal val="visible"/>
+                                      </p:to>
+                                    </p:set>
+                                    <p:animEffect transition="in" filter="fade">
+                                      <p:cBhvr>
+                                        <p:cTn id="97" dur="500"/>
+                                        <p:tgtEl>
+                                          <p:spTgt spid="7"/>
                                         </p:tgtEl>
                                       </p:cBhvr>
                                     </p:animEffect>
@@ -9938,6 +10177,13 @@
     <p:bldLst>
       <p:bldP spid="8" grpId="0"/>
       <p:bldP spid="48" grpId="0"/>
+      <p:bldP spid="2" grpId="0" animBg="1"/>
+      <p:bldP spid="7" grpId="0"/>
+      <p:bldP spid="9" grpId="0" animBg="1"/>
+      <p:bldP spid="13" grpId="0" animBg="1"/>
+      <p:bldP spid="21" grpId="0" animBg="1"/>
+      <p:bldP spid="23" grpId="0" animBg="1"/>
+      <p:bldP spid="26" grpId="0" animBg="1"/>
     </p:bldLst>
   </p:timing>
 </p:sld>
@@ -12234,33 +12480,15 @@
                                   </p:childTnLst>
                                 </p:cTn>
                               </p:par>
-                            </p:childTnLst>
-                          </p:cTn>
-                        </p:par>
-                      </p:childTnLst>
-                    </p:cTn>
-                  </p:par>
-                  <p:par>
-                    <p:cTn id="22" fill="hold">
-                      <p:stCondLst>
-                        <p:cond delay="indefinite"/>
-                      </p:stCondLst>
-                      <p:childTnLst>
-                        <p:par>
-                          <p:cTn id="23" fill="hold">
-                            <p:stCondLst>
-                              <p:cond delay="0"/>
-                            </p:stCondLst>
-                            <p:childTnLst>
                               <p:par>
-                                <p:cTn id="24" presetID="47" presetClass="entr" presetSubtype="0" fill="hold" grpId="0" nodeType="clickEffect">
+                                <p:cTn id="22" presetID="47" presetClass="entr" presetSubtype="0" fill="hold" grpId="0" nodeType="withEffect">
                                   <p:stCondLst>
                                     <p:cond delay="0"/>
                                   </p:stCondLst>
                                   <p:childTnLst>
                                     <p:set>
                                       <p:cBhvr>
-                                        <p:cTn id="25" dur="1" fill="hold">
+                                        <p:cTn id="23" dur="1" fill="hold">
                                           <p:stCondLst>
                                             <p:cond delay="0"/>
                                           </p:stCondLst>
@@ -12282,7 +12510,7 @@
                                     </p:set>
                                     <p:animEffect transition="in" filter="fade">
                                       <p:cBhvr>
-                                        <p:cTn id="26" dur="1000"/>
+                                        <p:cTn id="24" dur="1000"/>
                                         <p:tgtEl>
                                           <p:spTgt spid="6">
                                             <p:txEl>
@@ -12294,7 +12522,7 @@
                                     </p:animEffect>
                                     <p:anim calcmode="lin" valueType="num">
                                       <p:cBhvr>
-                                        <p:cTn id="27" dur="1000" fill="hold"/>
+                                        <p:cTn id="25" dur="1000" fill="hold"/>
                                         <p:tgtEl>
                                           <p:spTgt spid="6">
                                             <p:txEl>
@@ -12321,7 +12549,7 @@
                                     </p:anim>
                                     <p:anim calcmode="lin" valueType="num">
                                       <p:cBhvr>
-                                        <p:cTn id="28" dur="1000" fill="hold"/>
+                                        <p:cTn id="26" dur="1000" fill="hold"/>
                                         <p:tgtEl>
                                           <p:spTgt spid="6">
                                             <p:txEl>
@@ -12353,20 +12581,20 @@
                           </p:cTn>
                         </p:par>
                         <p:par>
-                          <p:cTn id="29" fill="hold">
+                          <p:cTn id="27" fill="hold">
                             <p:stCondLst>
-                              <p:cond delay="1000"/>
+                              <p:cond delay="3000"/>
                             </p:stCondLst>
                             <p:childTnLst>
                               <p:par>
-                                <p:cTn id="30" presetID="16" presetClass="entr" presetSubtype="21" fill="hold" nodeType="afterEffect">
+                                <p:cTn id="28" presetID="16" presetClass="entr" presetSubtype="21" fill="hold" nodeType="afterEffect">
                                   <p:stCondLst>
                                     <p:cond delay="0"/>
                                   </p:stCondLst>
                                   <p:childTnLst>
                                     <p:set>
                                       <p:cBhvr>
-                                        <p:cTn id="31" dur="1" fill="hold">
+                                        <p:cTn id="29" dur="1" fill="hold">
                                           <p:stCondLst>
                                             <p:cond delay="0"/>
                                           </p:stCondLst>
@@ -12384,7 +12612,7 @@
                                     </p:set>
                                     <p:animEffect transition="in" filter="barn(inVertical)">
                                       <p:cBhvr>
-                                        <p:cTn id="32" dur="500"/>
+                                        <p:cTn id="30" dur="500"/>
                                         <p:tgtEl>
                                           <p:spTgt spid="18"/>
                                         </p:tgtEl>
@@ -12397,20 +12625,20 @@
                           </p:cTn>
                         </p:par>
                         <p:par>
-                          <p:cTn id="33" fill="hold">
+                          <p:cTn id="31" fill="hold">
                             <p:stCondLst>
-                              <p:cond delay="1500"/>
+                              <p:cond delay="3500"/>
                             </p:stCondLst>
                             <p:childTnLst>
                               <p:par>
-                                <p:cTn id="34" presetID="6" presetClass="entr" presetSubtype="16" fill="hold" nodeType="afterEffect">
+                                <p:cTn id="32" presetID="6" presetClass="entr" presetSubtype="16" fill="hold" nodeType="afterEffect">
                                   <p:stCondLst>
                                     <p:cond delay="0"/>
                                   </p:stCondLst>
                                   <p:childTnLst>
                                     <p:set>
                                       <p:cBhvr>
-                                        <p:cTn id="35" dur="1" fill="hold">
+                                        <p:cTn id="33" dur="1" fill="hold">
                                           <p:stCondLst>
                                             <p:cond delay="0"/>
                                           </p:stCondLst>
@@ -12428,7 +12656,7 @@
                                     </p:set>
                                     <p:animEffect transition="in" filter="circle(in)">
                                       <p:cBhvr>
-                                        <p:cTn id="36" dur="2000"/>
+                                        <p:cTn id="34" dur="2000"/>
                                         <p:tgtEl>
                                           <p:spTgt spid="20"/>
                                         </p:tgtEl>
@@ -12466,7 +12694,7 @@
     </p:tnLst>
     <p:bldLst>
       <p:bldP spid="8" grpId="0"/>
-      <p:bldP spid="6" grpId="0" build="p"/>
+      <p:bldP spid="6" grpId="0" uiExpand="1" build="p"/>
     </p:bldLst>
   </p:timing>
 </p:sld>
